--- a/Adipocyte Auto-Labeler.pptx
+++ b/Adipocyte Auto-Labeler.pptx
@@ -4985,7 +4985,7 @@
             </a:r>
             <a:r>
               <a:rPr lang="en-US" dirty="0"/>
-              <a:t>.</a:t>
+              <a:t>, which is where it will place all labeled images.</a:t>
             </a:r>
           </a:p>
         </p:txBody>
@@ -5129,7 +5129,7 @@
             </a:r>
             <a:r>
               <a:rPr lang="en-US" dirty="0"/>
-              <a:t> has to be opened in order to be used.</a:t>
+              <a:t> has to be opened to be used.</a:t>
             </a:r>
           </a:p>
           <a:p>
@@ -5659,11 +5659,11 @@
             </a:br>
             <a:r>
               <a:rPr lang="en-US" b="1" u="sng" dirty="0"/>
-              <a:t>the image you currently have open </a:t>
-            </a:r>
-            <a:r>
-              <a:rPr lang="en-US" dirty="0"/>
-              <a:t>(bottom)</a:t>
+              <a:t>the image you currently have open</a:t>
+            </a:r>
+            <a:r>
+              <a:rPr lang="en-US" dirty="0"/>
+              <a:t> (bottom)</a:t>
             </a:r>
             <a:endParaRPr lang="en-US" b="1" u="sng" dirty="0"/>
           </a:p>
@@ -6707,7 +6707,15 @@
             <a:pPr lvl="1"/>
             <a:r>
               <a:rPr lang="en-US" dirty="0"/>
-              <a:t>This does not contain the model, which is too large to be stored de-compressed on GitHub. Reach out to me at </a:t>
+              <a:t>This </a:t>
+            </a:r>
+            <a:r>
+              <a:rPr lang="en-US" b="1" u="sng" dirty="0"/>
+              <a:t>does not contain the model</a:t>
+            </a:r>
+            <a:r>
+              <a:rPr lang="en-US" dirty="0"/>
+              <a:t>, which is too large to be stored de-compressed on GitHub. Reach out to me at </a:t>
             </a:r>
             <a:r>
               <a:rPr lang="en-US" dirty="0">
@@ -7129,7 +7137,7 @@
           <a:p>
             <a:r>
               <a:rPr lang="en-US" dirty="0"/>
-              <a:t>If you ever close the log window that pops up, you will have to re-open it if you would like to see what the script is doing. After installation is complete and the tool works, this is optional.</a:t>
+              <a:t>If you ever close the log window that pops up, you will have to re-open it if you would like to see what the script is doing. This is typically optional, but helpful to see what is happening.</a:t>
             </a:r>
           </a:p>
           <a:p>
@@ -7190,7 +7198,7 @@
           <a:p>
             <a:r>
               <a:rPr lang="en-US" dirty="0"/>
-              <a:t>Installing Plugin</a:t>
+              <a:t>Installing Plugin, Part 1</a:t>
             </a:r>
           </a:p>
         </p:txBody>
